--- a/docs/presentaciones/classes/clase-200-kubernetes-para-servir-modelos-a-escala-presentacion.pptx
+++ b/docs/presentaciones/classes/clase-200-kubernetes-para-servir-modelos-a-escala-presentacion.pptx
@@ -3272,7 +3272,7 @@
                 </a:solidFill>
                 <a:latin typeface="Segoe UI"/>
               </a:rPr>
-              <a:t>Parte: 4 — MLOps · Fuente: Huyen cap. 11 + Burns et al., Kubernetes: Up and Running (3ª ed.) + docs k8s.  Duración estimada: 90 min.</a:t>
+              <a:t>Parte: 4 — MLOps · Fuente: Huyen cap. 11 + Burns et al., Kubernetes: Up and Running (3ª ed.) + docs k8s.  Duración estimada: 90 min. · Nivel: Avanzado</a:t>
             </a:r>
           </a:p>
         </p:txBody>
@@ -3581,7 +3581,7 @@
                 </a:solidFill>
                 <a:latin typeface="Segoe UI"/>
               </a:rPr>
-              <a:t>Parte: 4 — MLOps · Fuente: Huyen cap. 11 + Burns et al., Kubernetes: Up and Running (3ª ed.) + docs k8s.  Duración estimada: 90 min.</a:t>
+              <a:t>Parte: 4 — MLOps · Fuente: Huyen cap. 11 + Burns et al., Kubernetes: Up and Running (3ª ed.) + docs k8s.  Duración estimada: 90 min. · Nivel: Avanzado</a:t>
             </a:r>
           </a:p>
         </p:txBody>
@@ -4823,7 +4823,7 @@
                 </a:solidFill>
                 <a:latin typeface="Segoe UI"/>
               </a:rPr>
-              <a:t>Notebook declarativo: genera los 5 manifests YAML mínimos para desplegar el iris-api en K8s. Para verlos en vivo: `bash kind create cluster --name ml</a:t>
+              <a:t>Antes de entrar a los YAML, quedate con la imagen mental de qué es Kubernetes: &gt; Kubernetes es un orquestador que mantiene N réplicas de tu servicio vivas y balancea la carga entre ellas — como el director de una orquesta que, si un músico falla a mitad de la obra, hace entrar al suplente sin que el público lo note. De ahí salen todos los objetos que verás:</a:t>
             </a:r>
           </a:p>
         </p:txBody>
